--- a/library/lectures/lec-02/rendered/lec-02.pptx
+++ b/library/lectures/lec-02/rendered/lec-02.pptx
@@ -1611,6 +1611,11 @@
               <a:t>И главное — на что конкретно влияет это распределение весов, а не просто «что-то там взвешивается». Вес каждой связи определяет, какая доля Value-вектора соответствующего токена попадёт в итоговое представление текущей позиции: если «он» отдаёт 0.7 веса «Кот», то именно содержимое «Кот» — его Value — доминирует в обновлённом представлении токена «он». А представление текущего токена — это именно то, из чего на следующем шаге строится распределение вероятностей для предсказания. Другими словами: распределение весов внимания напрямую и механически определяет, каким будет следующий предсказанный токен — это не побочный эффект, а прямая причинная цепочка.</a:t>
             </a:r>
           </a:p>
+          <a:p>
+            <a:r>
+              <a:t>Важная оговорка про 2025-2026: N×N — точное описание одного слоя dense-внимания, и оно остаётся базой для понимания механизма. Но в реальных продакшен-моделях 2025-2026 не все слои dense: Qwen3-Next и Kimi Linear оставляют dense-внимание только в 25% слоёв, остальные — линейные (O(N)); итоговая asymptotics всей модели уже не чисто квадратичная, но полностью линейной она тоже не становится, пока хотя бы часть слоёв остаётся dense — это компромисс, а не устранение проблемы.</a:t>
+            </a:r>
+          </a:p>
         </p:txBody>
       </p:sp>
       <p:sp>
@@ -2018,7 +2023,7 @@
           </a:p>
           <a:p>
             <a:r>
-              <a:t>Почему окно конечно и его нельзя «просто увеличить»? Первая причина знакома: квадратичная стоимость внимания плюс линейно растущий кэш. Вторая тоньше: позиция токена закодирована в геометрии модели способом, обученным на конкретных длинах, и наивное растяжение ломает механизм; методы расширения — RoPE, YaRN — разобраны в методичке для самостоятельного чтения: глава, часть 2 — раздел о позиционном кодировании.</a:t>
+              <a:t>Почему окно конечно и его нельзя «просто увеличить»? Тут две разные причины, и их стоит разделять. Первая — вычисления: даже там, где часть слоёв разреженная или линейная, цена всё равно растёт быстрее линейной на оставшихся dense-слоях. Вторая — память: KV-cache растёт линейно с числом токенов независимо от того, dense внимание или sparse, — разреженность решает, к какой части кэша обращаться, а не сколько его вообще нужно хранить; это отдельно решают MLA, GQA, квантизация, sliding window. На практике это не абстракция: при заявленных десяти миллионах токенов у Llama 4 Scout один только KV-cache требует порядка тридцати двух терабайт памяти — это физический, а не алгоритмический потолок. И третья причина, отдельная от compute/memory: позиция токена закодирована в геометрии модели способом, обученным на конкретных длинах, и наивное растяжение ломает механизм; методы расширения — RoPE, YaRN — разобраны в методичке для самостоятельного чтения: глава, часть 2 — раздел о позиционном кодировании.</a:t>
             </a:r>
           </a:p>
           <a:p>
@@ -21678,8 +21683,8 @@
         </p:nvSpPr>
         <p:spPr>
           <a:xfrm>
-            <a:off x="502920" y="5138928"/>
-            <a:ext cx="6858000" cy="731520"/>
+            <a:off x="502920" y="5102352"/>
+            <a:ext cx="6858000" cy="640080"/>
           </a:xfrm>
           <a:prstGeom prst="rect">
             <a:avLst/>
@@ -21694,11 +21699,11 @@
           <a:p>
             <a:pPr algn="l">
               <a:lnSpc>
-                <a:spcPct val="112000"/>
+                <a:spcPct val="108000"/>
               </a:lnSpc>
             </a:pPr>
             <a:r>
-              <a:rPr sz="1250" b="1" i="0">
+              <a:rPr sz="1200" b="1" i="0">
                 <a:solidFill>
                   <a:srgbClr val="21295C"/>
                 </a:solidFill>
@@ -21707,7 +21712,7 @@
               <a:t>По строке «он»: </a:t>
             </a:r>
             <a:r>
-              <a:rPr sz="1250" b="0" i="0">
+              <a:rPr sz="1200" b="0" i="0">
                 <a:solidFill>
                   <a:srgbClr val="21295C"/>
                 </a:solidFill>
@@ -21719,14 +21724,14 @@
           <a:p>
             <a:pPr algn="l">
               <a:lnSpc>
-                <a:spcPct val="112000"/>
+                <a:spcPct val="108000"/>
               </a:lnSpc>
               <a:spcBef>
-                <a:spcPts val="300"/>
+                <a:spcPts val="200"/>
               </a:spcBef>
             </a:pPr>
             <a:r>
-              <a:rPr sz="1150" b="0" i="1">
+              <a:rPr sz="1050" b="0" i="1">
                 <a:solidFill>
                   <a:srgbClr val="6B7685"/>
                 </a:solidFill>
@@ -22141,8 +22146,8 @@
         </p:nvSpPr>
         <p:spPr>
           <a:xfrm>
-            <a:off x="502920" y="5897880"/>
-            <a:ext cx="11201400" cy="640080"/>
+            <a:off x="502920" y="5760720"/>
+            <a:ext cx="11201400" cy="566928"/>
           </a:xfrm>
           <a:prstGeom prst="roundRect">
             <a:avLst>
@@ -22189,8 +22194,8 @@
         </p:nvSpPr>
         <p:spPr>
           <a:xfrm>
-            <a:off x="685800" y="5952744"/>
-            <a:ext cx="10835640" cy="530352"/>
+            <a:off x="685800" y="5815583"/>
+            <a:ext cx="10835640" cy="457200"/>
           </a:xfrm>
           <a:prstGeom prst="rect">
             <a:avLst/>
@@ -22209,7 +22214,7 @@
               </a:lnSpc>
             </a:pPr>
             <a:r>
-              <a:rPr sz="1450" b="1" i="0">
+              <a:rPr sz="1350" b="1" i="0">
                 <a:solidFill>
                   <a:srgbClr val="21295C"/>
                 </a:solidFill>
@@ -22223,6 +22228,45 @@
       <p:sp>
         <p:nvSpPr>
           <p:cNvPr id="17" name="TextBox 16"/>
+          <p:cNvSpPr txBox="1"/>
+          <p:nvPr/>
+        </p:nvSpPr>
+        <p:spPr>
+          <a:xfrm>
+            <a:off x="502920" y="6400800"/>
+            <a:ext cx="11201400" cy="320040"/>
+          </a:xfrm>
+          <a:prstGeom prst="rect">
+            <a:avLst/>
+          </a:prstGeom>
+          <a:noFill/>
+        </p:spPr>
+        <p:txBody>
+          <a:bodyPr wrap="square" lIns="0" rIns="0" tIns="0" bIns="0" anchor="t">
+            <a:spAutoFit/>
+          </a:bodyPr>
+          <a:lstStyle/>
+          <a:p>
+            <a:pPr algn="ctr">
+              <a:lnSpc>
+                <a:spcPct val="110000"/>
+              </a:lnSpc>
+            </a:pPr>
+            <a:r>
+              <a:rPr sz="1050" b="0" i="1">
+                <a:solidFill>
+                  <a:srgbClr val="1C7293"/>
+                </a:solidFill>
+                <a:latin typeface="Arial"/>
+              </a:rPr>
+              <a:t>Продакшен 2025-26: часть моделей заменяет часть слоёв на разреженное/линейное внимание — это снижает вычисления, но правило N×N остаётся базой и ценой полного внимания.</a:t>
+            </a:r>
+          </a:p>
+        </p:txBody>
+      </p:sp>
+      <p:sp>
+        <p:nvSpPr>
+          <p:cNvPr id="18" name="TextBox 17"/>
           <p:cNvSpPr txBox="1"/>
           <p:nvPr/>
         </p:nvSpPr>
@@ -29037,8 +29081,8 @@
         </p:nvSpPr>
         <p:spPr>
           <a:xfrm>
-            <a:off x="502920" y="4754880"/>
-            <a:ext cx="11201400" cy="502920"/>
+            <a:off x="502920" y="4681728"/>
+            <a:ext cx="11201400" cy="658368"/>
           </a:xfrm>
           <a:prstGeom prst="rect">
             <a:avLst/>
@@ -29053,17 +29097,36 @@
           <a:p>
             <a:pPr algn="ctr">
               <a:lnSpc>
-                <a:spcPct val="115000"/>
+                <a:spcPct val="112000"/>
               </a:lnSpc>
             </a:pPr>
             <a:r>
-              <a:rPr sz="1200" b="0" i="1">
+              <a:rPr sz="1150" b="0" i="1">
                 <a:solidFill>
                   <a:srgbClr val="1C7293"/>
                 </a:solidFill>
                 <a:latin typeface="Arial"/>
               </a:rPr>
               <a:t>Просто «растянуть» окно нельзя: позиция токена закодирована геометрией, обученной на конкретных длинах, — расширение (RoPE / YaRN) — отдельная инженерная работа.</a:t>
+            </a:r>
+          </a:p>
+          <a:p>
+            <a:pPr algn="ctr">
+              <a:lnSpc>
+                <a:spcPct val="112000"/>
+              </a:lnSpc>
+              <a:spcBef>
+                <a:spcPts val="200"/>
+              </a:spcBef>
+            </a:pPr>
+            <a:r>
+              <a:rPr sz="1150" b="0" i="1">
+                <a:solidFill>
+                  <a:srgbClr val="1C7293"/>
+                </a:solidFill>
+                <a:latin typeface="Arial"/>
+              </a:rPr>
+              <a:t>10M заявка ≈ 32 ТБ KV-cache — физический потолок.</a:t>
             </a:r>
           </a:p>
         </p:txBody>
@@ -29076,8 +29139,8 @@
         </p:nvSpPr>
         <p:spPr>
           <a:xfrm>
-            <a:off x="502920" y="5394960"/>
-            <a:ext cx="11201400" cy="621792"/>
+            <a:off x="502920" y="5413248"/>
+            <a:ext cx="11201400" cy="566928"/>
           </a:xfrm>
           <a:prstGeom prst="roundRect">
             <a:avLst>
@@ -29124,8 +29187,8 @@
         </p:nvSpPr>
         <p:spPr>
           <a:xfrm>
-            <a:off x="685800" y="5449824"/>
-            <a:ext cx="10835640" cy="512064"/>
+            <a:off x="685800" y="5468112"/>
+            <a:ext cx="10835640" cy="457200"/>
           </a:xfrm>
           <a:prstGeom prst="rect">
             <a:avLst/>
@@ -29144,7 +29207,7 @@
               </a:lnSpc>
             </a:pPr>
             <a:r>
-              <a:rPr sz="1350" b="1" i="0">
+              <a:rPr sz="1300" b="1" i="0">
                 <a:solidFill>
                   <a:srgbClr val="21295C"/>
                 </a:solidFill>
@@ -29163,7 +29226,7 @@
         </p:nvSpPr>
         <p:spPr>
           <a:xfrm>
-            <a:off x="502920" y="6062472"/>
+            <a:off x="502920" y="6053328"/>
             <a:ext cx="11201400" cy="502920"/>
           </a:xfrm>
           <a:prstGeom prst="rect">
